--- a/examples/repositories/scene-graph-showcase/draft.pptx
+++ b/examples/repositories/scene-graph-showcase/draft.pptx
@@ -3147,7 +3147,7 @@
         </p:nvSpPr>
         <p:spPr>
           <a:xfrm>
-            <a:off x="612648" y="3840480"/>
+            <a:off x="612648" y="4206240"/>
             <a:ext cx="10966399" cy="1097280"/>
           </a:xfrm>
           <a:prstGeom prst="rect">
@@ -3296,7 +3296,7 @@
         </p:nvSpPr>
         <p:spPr>
           <a:xfrm>
-            <a:off x="1069848" y="1371600"/>
+            <a:off x="1069848" y="1051560"/>
             <a:ext cx="1828800" cy="1828800"/>
           </a:xfrm>
           <a:prstGeom prst="rect">
@@ -3332,7 +3332,7 @@
         </p:nvSpPr>
         <p:spPr>
           <a:xfrm>
-            <a:off x="1069848" y="2926080"/>
+            <a:off x="1069848" y="3429000"/>
             <a:ext cx="10966399" cy="1828800"/>
           </a:xfrm>
           <a:prstGeom prst="rect">
